--- a/Slides/MobiAssiste - Apresentação Pitch.pptx
+++ b/Slides/MobiAssiste - Apresentação Pitch.pptx
@@ -82,7 +82,7 @@
         <p:txBody>
           <a:bodyPr/>
           <a:p>
-            <a:fld id="{88A8C9DC-FAD0-467A-A36B-4DABFFB12441}" type="slidenum">
+            <a:fld id="{7BEF19CC-17BD-4518-9866-B3C3A3081347}" type="slidenum">
               <a:t>&lt;#&gt;</a:t>
             </a:fld>
           </a:p>
@@ -165,7 +165,7 @@
         <p:txBody>
           <a:bodyPr/>
           <a:p>
-            <a:fld id="{BDE595BF-B2A5-4D82-99A2-C075AC8CB3FF}" type="slidenum">
+            <a:fld id="{6C64F8D1-42AA-4C48-8D1F-67BB1A70D9F0}" type="slidenum">
               <a:t>&lt;#&gt;</a:t>
             </a:fld>
           </a:p>
@@ -248,7 +248,7 @@
         <p:txBody>
           <a:bodyPr/>
           <a:p>
-            <a:fld id="{20FBE8CF-C943-474B-97A6-E869ADCB0FEA}" type="slidenum">
+            <a:fld id="{84A8D019-1843-4CA1-BC67-EF365EDB3B3E}" type="slidenum">
               <a:t>&lt;#&gt;</a:t>
             </a:fld>
           </a:p>
@@ -331,7 +331,7 @@
         <p:txBody>
           <a:bodyPr/>
           <a:p>
-            <a:fld id="{0E8C358F-EA4E-45B2-AC4A-BE26298FEA05}" type="slidenum">
+            <a:fld id="{364D44FD-8504-4593-9892-6066163ADB60}" type="slidenum">
               <a:t>&lt;#&gt;</a:t>
             </a:fld>
           </a:p>
@@ -414,7 +414,7 @@
         <p:txBody>
           <a:bodyPr/>
           <a:p>
-            <a:fld id="{C1E79BC6-BE51-414C-8D7F-220BB49F8CA5}" type="slidenum">
+            <a:fld id="{BC93F567-1EBC-41A7-8511-325AFD7017A6}" type="slidenum">
               <a:t>&lt;#&gt;</a:t>
             </a:fld>
           </a:p>
@@ -497,7 +497,7 @@
         <p:txBody>
           <a:bodyPr/>
           <a:p>
-            <a:fld id="{305B3AD7-4228-476C-AFBF-78134E6B58E8}" type="slidenum">
+            <a:fld id="{72C7D1D0-84BA-4700-98CD-8506206559EE}" type="slidenum">
               <a:t>&lt;#&gt;</a:t>
             </a:fld>
           </a:p>
@@ -660,7 +660,7 @@
         <p:txBody>
           <a:bodyPr/>
           <a:p>
-            <a:fld id="{BDB41E80-A48D-45E1-8F74-26C66F003112}" type="slidenum">
+            <a:fld id="{E782B815-2B4B-4C0E-B612-B4630F6530CF}" type="slidenum">
               <a:t>&lt;#&gt;</a:t>
             </a:fld>
           </a:p>
@@ -826,7 +826,7 @@
         <p:txBody>
           <a:bodyPr/>
           <a:p>
-            <a:fld id="{0B51A6D1-8407-4A04-B697-9CD6391A7BD0}" type="slidenum">
+            <a:fld id="{6664C4B0-2E0C-4757-A048-8E7987EF36CA}" type="slidenum">
               <a:t>&lt;#&gt;</a:t>
             </a:fld>
           </a:p>
@@ -909,7 +909,7 @@
         <p:txBody>
           <a:bodyPr/>
           <a:p>
-            <a:fld id="{1E7B62C3-5379-4E4B-8A5E-0840D5736BD3}" type="slidenum">
+            <a:fld id="{53BBEF0C-A18C-482D-9BC1-BF36BB728719}" type="slidenum">
               <a:t>&lt;#&gt;</a:t>
             </a:fld>
           </a:p>
@@ -1118,7 +1118,7 @@
         <p:txBody>
           <a:bodyPr/>
           <a:p>
-            <a:fld id="{86AE83A6-21D1-4624-BFDF-189F88AA3FE8}" type="slidenum">
+            <a:fld id="{E2D8B595-3D78-44B4-BF03-DAFFE40E74A2}" type="slidenum">
               <a:t>&lt;#&gt;</a:t>
             </a:fld>
           </a:p>
@@ -1201,7 +1201,7 @@
         <p:txBody>
           <a:bodyPr/>
           <a:p>
-            <a:fld id="{8205BEC6-3860-4E4E-A1E4-ED9B5B5A7DC0}" type="slidenum">
+            <a:fld id="{DC2F886D-B532-4D8F-9374-55D78E3FE601}" type="slidenum">
               <a:t>&lt;#&gt;</a:t>
             </a:fld>
           </a:p>
@@ -1324,7 +1324,7 @@
         <p:txBody>
           <a:bodyPr/>
           <a:p>
-            <a:fld id="{201CBA46-AE19-462E-8D76-3B200F9046D5}" type="slidenum">
+            <a:fld id="{8AB2D57F-8250-4DD7-8D06-9F663884388A}" type="slidenum">
               <a:t>&lt;#&gt;</a:t>
             </a:fld>
           </a:p>
@@ -1555,7 +1555,7 @@
                 <a:tab algn="l" pos="0"/>
               </a:tabLst>
             </a:pPr>
-            <a:fld id="{8938776C-C038-4A67-BBF2-06DAEE231A2B}" type="slidenum">
+            <a:fld id="{940BCC5C-1D28-4C50-A99A-460EC032B647}" type="slidenum">
               <a:rPr b="0" lang="en-US" sz="1200" spc="-1" strike="noStrike">
                 <a:solidFill>
                   <a:srgbClr val="888888"/>
@@ -2555,7 +2555,7 @@
                 <a:tab algn="l" pos="0"/>
               </a:tabLst>
             </a:pPr>
-            <a:fld id="{EA422481-0B77-48D9-82E3-1B71D3655CCF}" type="slidenum">
+            <a:fld id="{3F9B18AB-78B5-4B31-9593-BB98C56954FD}" type="slidenum">
               <a:rPr b="0" lang="en-US" sz="1200" spc="-1" strike="noStrike">
                 <a:solidFill>
                   <a:srgbClr val="888888"/>
@@ -3281,7 +3281,7 @@
                 <a:tab algn="l" pos="0"/>
               </a:tabLst>
             </a:pPr>
-            <a:fld id="{7CED08E0-F105-4E68-8816-16E44A9B4581}" type="slidenum">
+            <a:fld id="{CA93B1F2-E83F-46B2-8FA3-E6BA73FF8598}" type="slidenum">
               <a:rPr b="0" lang="en-US" sz="1200" spc="-1" strike="noStrike">
                 <a:solidFill>
                   <a:srgbClr val="888888"/>
@@ -3508,7 +3508,7 @@
                 <a:tab algn="l" pos="0"/>
               </a:tabLst>
             </a:pPr>
-            <a:fld id="{51128211-FA86-436F-BA3E-373456B6689C}" type="slidenum">
+            <a:fld id="{A5928DB0-7F57-4AD9-80BE-9A407DE2D1CD}" type="slidenum">
               <a:rPr b="0" lang="en-US" sz="1200" spc="-1" strike="noStrike">
                 <a:solidFill>
                   <a:srgbClr val="888888"/>
@@ -4283,7 +4283,7 @@
                 <a:tab algn="l" pos="0"/>
               </a:tabLst>
             </a:pPr>
-            <a:fld id="{BE133237-25C0-476B-A231-8BAD14647C0D}" type="slidenum">
+            <a:fld id="{E2B52CD6-276C-4A04-8602-F8182FC9DB98}" type="slidenum">
               <a:rPr b="0" lang="en-US" sz="1200" spc="-1" strike="noStrike">
                 <a:solidFill>
                   <a:srgbClr val="888888"/>
@@ -4784,7 +4784,7 @@
                 <a:tab algn="l" pos="0"/>
               </a:tabLst>
             </a:pPr>
-            <a:fld id="{1B485DF7-A89E-49FA-9BE3-70E04278A244}" type="slidenum">
+            <a:fld id="{94028D63-F4C3-49F8-A90E-18590B7A738E}" type="slidenum">
               <a:rPr b="0" lang="en-US" sz="1200" spc="-1" strike="noStrike">
                 <a:solidFill>
                   <a:srgbClr val="888888"/>
@@ -5060,7 +5060,7 @@
                 <a:tab algn="l" pos="0"/>
               </a:tabLst>
             </a:pPr>
-            <a:fld id="{1BA659CC-8880-463E-871E-CE9A7F7D086B}" type="slidenum">
+            <a:fld id="{4098E843-CE2F-479E-B883-DD5DB6F2EC11}" type="slidenum">
               <a:rPr b="0" lang="en-US" sz="1200" spc="-1" strike="noStrike">
                 <a:solidFill>
                   <a:srgbClr val="888888"/>
@@ -5561,7 +5561,7 @@
                 <a:tab algn="l" pos="0"/>
               </a:tabLst>
             </a:pPr>
-            <a:fld id="{95044469-7887-4418-BEC8-92B68978041C}" type="slidenum">
+            <a:fld id="{A637A3AA-42FD-45D5-A4E7-7C1F332A240F}" type="slidenum">
               <a:rPr b="0" lang="en-US" sz="1200" spc="-1" strike="noStrike">
                 <a:solidFill>
                   <a:srgbClr val="888888"/>
@@ -6062,7 +6062,7 @@
                 <a:tab algn="l" pos="0"/>
               </a:tabLst>
             </a:pPr>
-            <a:fld id="{7219A5C8-7DC7-41C4-8F9D-37DF3A8571FE}" type="slidenum">
+            <a:fld id="{58AFB32D-AE39-47F1-8388-155735965645}" type="slidenum">
               <a:rPr b="0" lang="en-US" sz="1200" spc="-1" strike="noStrike">
                 <a:solidFill>
                   <a:srgbClr val="888888"/>
@@ -6788,7 +6788,7 @@
                 <a:tab algn="l" pos="0"/>
               </a:tabLst>
             </a:pPr>
-            <a:fld id="{8A9C4D82-A5F6-4F7C-A79E-E93A8E14736A}" type="slidenum">
+            <a:fld id="{825398C6-BDBE-4757-8095-C8DAB596FFD9}" type="slidenum">
               <a:rPr b="0" lang="en-US" sz="1200" spc="-1" strike="noStrike">
                 <a:solidFill>
                   <a:srgbClr val="888888"/>
@@ -7964,7 +7964,7 @@
                 <a:tab algn="l" pos="0"/>
               </a:tabLst>
             </a:pPr>
-            <a:fld id="{8A526C15-9808-48B4-86BE-670E6C9ADC0C}" type="slidenum">
+            <a:fld id="{417F0189-7FAD-4510-973D-82435EE950CD}" type="slidenum">
               <a:rPr b="0" lang="en-US" sz="1200" spc="-1" strike="noStrike">
                 <a:solidFill>
                   <a:srgbClr val="888888"/>
@@ -8240,7 +8240,7 @@
                 <a:tab algn="l" pos="0"/>
               </a:tabLst>
             </a:pPr>
-            <a:fld id="{77FCEB8C-60CC-4495-82D0-E45E8A706BD2}" type="slidenum">
+            <a:fld id="{F8161692-D25F-4B58-BD63-DD3954F613D0}" type="slidenum">
               <a:rPr b="0" lang="en-US" sz="1200" spc="-1" strike="noStrike">
                 <a:solidFill>
                   <a:srgbClr val="888888"/>
